--- a/assets/pptx/catalog-778.pptx
+++ b/assets/pptx/catalog-778.pptx
@@ -3301,7 +3301,7 @@
                 <a:ea typeface="Ebrima"/>
                 <a:cs typeface="Ebrima"/>
               </a:rPr>
-              <a:t>አልፈራም ጌታ አለ ከእኔ ጋራ (2x)</a:t>
+              <a:t>አልፈራም ጌታ አለ ከእኔ ጋራ 2x</a:t>
             </a:r>
           </a:p>
         </p:txBody>
@@ -3368,7 +3368,7 @@
                 <a:ea typeface="Ebrima"/>
                 <a:cs typeface="Ebrima"/>
               </a:rPr>
-              <a:t>ተማምኜ ወጣሁ በጌታዬ ጉልበት (በጉልበት በጉልበት)</a:t>
+              <a:t>ተማምኜ ወጣሁ በጌታዬ ጉልበት በጉልበት በጉልበት</a:t>
             </a:r>
           </a:p>
           <a:p>
@@ -3386,7 +3386,7 @@
                 <a:ea typeface="Ebrima"/>
                 <a:cs typeface="Ebrima"/>
               </a:rPr>
-              <a:t>እኔ የፈራሁት ተመታ በድንገት (በድንገት በድንገት)</a:t>
+              <a:t>እኔ የፈራሁት ተመታ በድንገት በድንገት በድንገት</a:t>
             </a:r>
           </a:p>
           <a:p>
@@ -3404,7 +3404,7 @@
                 <a:ea typeface="Ebrima"/>
                 <a:cs typeface="Ebrima"/>
               </a:rPr>
-              <a:t>ንጉስ መጣ ቢባል የማይፈራ ማነው (ማነው ማነው)</a:t>
+              <a:t>ንጉስ መጣ ቢባል የማይፈራ ማነው ማነው ማነው</a:t>
             </a:r>
           </a:p>
           <a:p>
@@ -3422,7 +3422,7 @@
                 <a:ea typeface="Ebrima"/>
                 <a:cs typeface="Ebrima"/>
               </a:rPr>
-              <a:t>የጌትዬ ግርማ ከዚህ ሁሉ በላይ ነው (በላይ ነው በላይ ነው)</a:t>
+              <a:t>የጌትዬ ግርማ ከዚህ ሁሉ በላይ ነው በላይ ነው በላይ ነው</a:t>
             </a:r>
           </a:p>
           <a:p>
@@ -3440,7 +3440,7 @@
                 <a:ea typeface="Ebrima"/>
                 <a:cs typeface="Ebrima"/>
               </a:rPr>
-              <a:t>በላይ ነው በላይ ነው (4x)</a:t>
+              <a:t>በላይ ነው በላይ ነው 4x</a:t>
             </a:r>
           </a:p>
         </p:txBody>
@@ -3561,7 +3561,7 @@
                 <a:ea typeface="Ebrima"/>
                 <a:cs typeface="Ebrima"/>
               </a:rPr>
-              <a:t>አልፈራም ጌታ አለ ከኔ ጋራ (2x)</a:t>
+              <a:t>አልፈራም ጌታ አለ ከኔ ጋራ 2x</a:t>
             </a:r>
           </a:p>
         </p:txBody>
@@ -3628,7 +3628,7 @@
                 <a:ea typeface="Ebrima"/>
                 <a:cs typeface="Ebrima"/>
               </a:rPr>
-              <a:t>ቀይ ባህር ለሁለት ተከፈለ ቆመ (አዎ ተከፈለ)</a:t>
+              <a:t>ቀይ ባህር ለሁለት ተከፈለ ቆመ አዎ ተከፈለ</a:t>
             </a:r>
           </a:p>
           <a:p>
@@ -3646,7 +3646,7 @@
                 <a:ea typeface="Ebrima"/>
                 <a:cs typeface="Ebrima"/>
               </a:rPr>
-              <a:t>እስራኤል በደረቅ በድል ተሻገረ (አዎ ተሻገረ)</a:t>
+              <a:t>እስራኤል በደረቅ በድል ተሻገረ አዎ ተሻገረ</a:t>
             </a:r>
           </a:p>
           <a:p>
@@ -3664,7 +3664,7 @@
                 <a:ea typeface="Ebrima"/>
                 <a:cs typeface="Ebrima"/>
               </a:rPr>
-              <a:t>እግዚአብሔር ሲሰራ የሚከለክል ማነው (ማነው ማነው)</a:t>
+              <a:t>እግዚአብሔር ሲሰራ የሚከለክል ማነው ማነው ማነው</a:t>
             </a:r>
           </a:p>
           <a:p>
@@ -3682,7 +3682,7 @@
                 <a:ea typeface="Ebrima"/>
                 <a:cs typeface="Ebrima"/>
               </a:rPr>
-              <a:t>ሚተክል ሚነቅል የሚያፈርስ እሱ ነው (አዎ እርሱ ነው)</a:t>
+              <a:t>ሚተክል ሚነቅል የሚያፈርስ እሱ ነው አዎ እርሱ ነው</a:t>
             </a:r>
           </a:p>
           <a:p>
@@ -3700,7 +3700,7 @@
                 <a:ea typeface="Ebrima"/>
                 <a:cs typeface="Ebrima"/>
               </a:rPr>
-              <a:t>እርሱ ነው እርሱ ነው (4x)</a:t>
+              <a:t>እርሱ ነው እርሱ ነው 4x</a:t>
             </a:r>
           </a:p>
         </p:txBody>
@@ -3821,7 +3821,7 @@
                 <a:ea typeface="Ebrima"/>
                 <a:cs typeface="Ebrima"/>
               </a:rPr>
-              <a:t>አልፈራም ጌታ አለ ከእኔ ጋራ (2x)</a:t>
+              <a:t>አልፈራም ጌታ አለ ከእኔ ጋራ 2x</a:t>
             </a:r>
           </a:p>
         </p:txBody>
@@ -3888,7 +3888,7 @@
                 <a:ea typeface="Ebrima"/>
                 <a:cs typeface="Ebrima"/>
               </a:rPr>
-              <a:t>ተማምኜ ወጣሁ በጌታዬ ጉልበት (ጉልበት በጉልበት)</a:t>
+              <a:t>ተማምኜ ወጣሁ በጌታዬ ጉልበት ጉልበት በጉልበት</a:t>
             </a:r>
           </a:p>
           <a:p>
@@ -3906,7 +3906,7 @@
                 <a:ea typeface="Ebrima"/>
                 <a:cs typeface="Ebrima"/>
               </a:rPr>
-              <a:t>እኔ የፈራሁት ተመታ በድንገት (በድንገት በድንገት)</a:t>
+              <a:t>እኔ የፈራሁት ተመታ በድንገት በድንገት በድንገት</a:t>
             </a:r>
           </a:p>
           <a:p>
@@ -3924,7 +3924,7 @@
                 <a:ea typeface="Ebrima"/>
                 <a:cs typeface="Ebrima"/>
               </a:rPr>
-              <a:t>ንጉስ መጣ ቢባል የማይፈራ ማነው (ማነው ማነው)</a:t>
+              <a:t>ንጉስ መጣ ቢባል የማይፈራ ማነው ማነው ማነው</a:t>
             </a:r>
           </a:p>
           <a:p>
@@ -3942,7 +3942,7 @@
                 <a:ea typeface="Ebrima"/>
                 <a:cs typeface="Ebrima"/>
               </a:rPr>
-              <a:t>የጌትዬ ግርማ ከዚህ ሁሉ በላይ ነው (በላይ ነው በላይ ነው)</a:t>
+              <a:t>የጌትዬ ግርማ ከዚህ ሁሉ በላይ ነው በላይ ነው በላይ ነው</a:t>
             </a:r>
           </a:p>
           <a:p>
@@ -3960,7 +3960,7 @@
                 <a:ea typeface="Ebrima"/>
                 <a:cs typeface="Ebrima"/>
               </a:rPr>
-              <a:t>በላይ ነው በላይ ነው (4x)</a:t>
+              <a:t>በላይ ነው በላይ ነው 4x</a:t>
             </a:r>
           </a:p>
         </p:txBody>
@@ -4081,7 +4081,7 @@
                 <a:ea typeface="Ebrima"/>
                 <a:cs typeface="Ebrima"/>
               </a:rPr>
-              <a:t>አልፈራም ጌታ አለ ከእኔ ጋራ (2x)</a:t>
+              <a:t>አልፈራም ጌታ አለ ከእኔ ጋራ 2x</a:t>
             </a:r>
           </a:p>
         </p:txBody>
